--- a/Презентации/11.pptx
+++ b/Презентации/11.pptx
@@ -5064,7 +5064,7 @@
         </p:blipFill>
         <p:spPr>
           <a:xfrm>
-            <a:off x="661475" y="2622352"/>
+            <a:off x="661475" y="3813414"/>
             <a:ext cx="6296860" cy="3077964"/>
           </a:xfrm>
           <a:prstGeom prst="rect">
@@ -5081,7 +5081,7 @@
         <p:spPr>
           <a:xfrm>
             <a:off x="686738" y="2682762"/>
-            <a:ext cx="6246334" cy="377812"/>
+            <a:ext cx="6246334" cy="1425004"/>
           </a:xfrm>
           <a:prstGeom prst="rect">
             <a:avLst/>
@@ -5102,7 +5102,7 @@
               <a:buNone/>
             </a:pPr>
             <a:r>
-              <a:rPr lang="en-US" sz="750" dirty="0">
+              <a:rPr lang="en-US" sz="1600" dirty="0">
                 <a:solidFill>
                   <a:srgbClr val="000000"/>
                 </a:solidFill>
@@ -5112,7 +5112,7 @@
               </a:rPr>
               <a:t>Цель — сделать объекты внутри одного кластера похожими друг на друга, а объекты из разных кластеров — различными. Основное ограничение: необходимость заранее указать количество кластеров, и алгоритм лучше всего работает с группами простой формы.</a:t>
             </a:r>
-            <a:endParaRPr lang="en-US" sz="750" dirty="0"/>
+            <a:endParaRPr lang="en-US" sz="1600" dirty="0"/>
           </a:p>
         </p:txBody>
       </p:sp>
